--- a/chapter12/parts/part-02-databases-and-cloud-storage/clip.pptx
+++ b/chapter12/parts/part-02-databases-and-cloud-storage/clip.pptx
@@ -4326,10 +4326,12 @@
           </a:bodyPr>
           <a:lstStyle/>
           <a:p>
-            <a:pPr>
+            <a:pPr lvl="0" marL="457200" indent="-228600">
+              <a:buFont typeface="Calibri"/>
               <a:spcAft>
                 <a:spcPts val="1000"/>
               </a:spcAft>
+              <a:buSzPct val="100000"/>
               <a:buChar char="•"/>
               <a:lnSpc>
                 <a:spcPts val="2200"/>
@@ -4346,10 +4348,12 @@
             </a:r>
           </a:p>
           <a:p>
-            <a:pPr>
+            <a:pPr lvl="0" marL="457200" indent="-228600">
+              <a:buFont typeface="Calibri"/>
               <a:spcAft>
                 <a:spcPts val="1000"/>
               </a:spcAft>
+              <a:buSzPct val="100000"/>
               <a:buChar char="•"/>
               <a:lnSpc>
                 <a:spcPts val="2200"/>
@@ -4485,10 +4489,12 @@
           </a:bodyPr>
           <a:lstStyle/>
           <a:p>
-            <a:pPr>
+            <a:pPr lvl="0" marL="457200" indent="-228600">
+              <a:buFont typeface="Calibri"/>
               <a:spcAft>
                 <a:spcPts val="1000"/>
               </a:spcAft>
+              <a:buSzPct val="100000"/>
               <a:buChar char="•"/>
               <a:lnSpc>
                 <a:spcPts val="2200"/>
@@ -4624,10 +4630,12 @@
           </a:bodyPr>
           <a:lstStyle/>
           <a:p>
-            <a:pPr>
+            <a:pPr lvl="0" marL="457200" indent="-228600">
+              <a:buFont typeface="Calibri"/>
               <a:spcAft>
                 <a:spcPts val="1000"/>
               </a:spcAft>
+              <a:buSzPct val="100000"/>
               <a:buChar char="•"/>
               <a:lnSpc>
                 <a:spcPts val="2200"/>
@@ -4644,10 +4652,12 @@
             </a:r>
           </a:p>
           <a:p>
-            <a:pPr>
+            <a:pPr lvl="0" marL="457200" indent="-228600">
+              <a:buFont typeface="Calibri"/>
               <a:spcAft>
                 <a:spcPts val="1000"/>
               </a:spcAft>
+              <a:buSzPct val="100000"/>
               <a:buChar char="•"/>
               <a:lnSpc>
                 <a:spcPts val="2200"/>
@@ -4664,10 +4674,12 @@
             </a:r>
           </a:p>
           <a:p>
-            <a:pPr>
+            <a:pPr lvl="0" marL="457200" indent="-228600">
+              <a:buFont typeface="Calibri"/>
               <a:spcAft>
                 <a:spcPts val="1000"/>
               </a:spcAft>
+              <a:buSzPct val="100000"/>
               <a:buChar char="•"/>
               <a:lnSpc>
                 <a:spcPts val="2200"/>
@@ -4803,10 +4815,12 @@
           </a:bodyPr>
           <a:lstStyle/>
           <a:p>
-            <a:pPr>
+            <a:pPr lvl="0" marL="457200" indent="-228600">
+              <a:buFont typeface="Calibri"/>
               <a:spcAft>
                 <a:spcPts val="1000"/>
               </a:spcAft>
+              <a:buSzPct val="100000"/>
               <a:buChar char="•"/>
               <a:lnSpc>
                 <a:spcPts val="2200"/>
@@ -4823,10 +4837,12 @@
             </a:r>
           </a:p>
           <a:p>
-            <a:pPr>
+            <a:pPr lvl="0" marL="457200" indent="-228600">
+              <a:buFont typeface="Calibri"/>
               <a:spcAft>
                 <a:spcPts val="1000"/>
               </a:spcAft>
+              <a:buSzPct val="100000"/>
               <a:buChar char="•"/>
               <a:lnSpc>
                 <a:spcPts val="2200"/>
@@ -4962,10 +4978,12 @@
           </a:bodyPr>
           <a:lstStyle/>
           <a:p>
-            <a:pPr>
+            <a:pPr lvl="0" marL="457200" indent="-228600">
+              <a:buFont typeface="Calibri"/>
               <a:spcAft>
                 <a:spcPts val="1000"/>
               </a:spcAft>
+              <a:buSzPct val="100000"/>
               <a:buChar char="•"/>
               <a:lnSpc>
                 <a:spcPts val="2200"/>
@@ -4982,10 +5000,12 @@
             </a:r>
           </a:p>
           <a:p>
-            <a:pPr>
+            <a:pPr lvl="0" marL="457200" indent="-228600">
+              <a:buFont typeface="Calibri"/>
               <a:spcAft>
                 <a:spcPts val="1000"/>
               </a:spcAft>
+              <a:buSzPct val="100000"/>
               <a:buChar char="•"/>
               <a:lnSpc>
                 <a:spcPts val="2200"/>
@@ -5002,10 +5022,12 @@
             </a:r>
           </a:p>
           <a:p>
-            <a:pPr>
+            <a:pPr lvl="0" marL="457200" indent="-228600">
+              <a:buFont typeface="Calibri"/>
               <a:spcAft>
                 <a:spcPts val="1000"/>
               </a:spcAft>
+              <a:buSzPct val="100000"/>
               <a:buChar char="•"/>
               <a:lnSpc>
                 <a:spcPts val="2200"/>
@@ -5141,10 +5163,12 @@
           </a:bodyPr>
           <a:lstStyle/>
           <a:p>
-            <a:pPr>
+            <a:pPr lvl="0" marL="457200" indent="-228600">
+              <a:buFont typeface="Calibri"/>
               <a:spcAft>
                 <a:spcPts val="1000"/>
               </a:spcAft>
+              <a:buSzPct val="100000"/>
               <a:buChar char="•"/>
               <a:lnSpc>
                 <a:spcPts val="2200"/>
@@ -5161,10 +5185,12 @@
             </a:r>
           </a:p>
           <a:p>
-            <a:pPr>
+            <a:pPr lvl="0" marL="457200" indent="-228600">
+              <a:buFont typeface="Calibri"/>
               <a:spcAft>
                 <a:spcPts val="1000"/>
               </a:spcAft>
+              <a:buSzPct val="100000"/>
               <a:buChar char="•"/>
               <a:lnSpc>
                 <a:spcPts val="2200"/>
@@ -5181,10 +5207,12 @@
             </a:r>
           </a:p>
           <a:p>
-            <a:pPr>
+            <a:pPr lvl="0" marL="457200" indent="-228600">
+              <a:buFont typeface="Calibri"/>
               <a:spcAft>
                 <a:spcPts val="1000"/>
               </a:spcAft>
+              <a:buSzPct val="100000"/>
               <a:buChar char="•"/>
               <a:lnSpc>
                 <a:spcPts val="2200"/>
@@ -5201,10 +5229,12 @@
             </a:r>
           </a:p>
           <a:p>
-            <a:pPr>
+            <a:pPr lvl="0" marL="457200" indent="-228600">
+              <a:buFont typeface="Calibri"/>
               <a:spcAft>
                 <a:spcPts val="1000"/>
               </a:spcAft>
+              <a:buSzPct val="100000"/>
               <a:buChar char="•"/>
               <a:lnSpc>
                 <a:spcPts val="2200"/>
@@ -5221,10 +5251,12 @@
             </a:r>
           </a:p>
           <a:p>
-            <a:pPr>
+            <a:pPr lvl="0" marL="457200" indent="-228600">
+              <a:buFont typeface="Calibri"/>
               <a:spcAft>
                 <a:spcPts val="1000"/>
               </a:spcAft>
+              <a:buSzPct val="100000"/>
               <a:buChar char="•"/>
               <a:lnSpc>
                 <a:spcPts val="2200"/>
@@ -5360,10 +5392,12 @@
           </a:bodyPr>
           <a:lstStyle/>
           <a:p>
-            <a:pPr>
+            <a:pPr lvl="0" marL="457200" indent="-228600">
+              <a:buFont typeface="Calibri"/>
               <a:spcAft>
                 <a:spcPts val="1000"/>
               </a:spcAft>
+              <a:buSzPct val="100000"/>
               <a:buChar char="•"/>
               <a:lnSpc>
                 <a:spcPts val="2200"/>
@@ -5380,10 +5414,12 @@
             </a:r>
           </a:p>
           <a:p>
-            <a:pPr>
+            <a:pPr lvl="0" marL="457200" indent="-228600">
+              <a:buFont typeface="Calibri"/>
               <a:spcAft>
                 <a:spcPts val="1000"/>
               </a:spcAft>
+              <a:buSzPct val="100000"/>
               <a:buChar char="•"/>
               <a:lnSpc>
                 <a:spcPts val="2200"/>
@@ -5400,10 +5436,12 @@
             </a:r>
           </a:p>
           <a:p>
-            <a:pPr>
+            <a:pPr lvl="0" marL="457200" indent="-228600">
+              <a:buFont typeface="Calibri"/>
               <a:spcAft>
                 <a:spcPts val="1000"/>
               </a:spcAft>
+              <a:buSzPct val="100000"/>
               <a:buChar char="•"/>
               <a:lnSpc>
                 <a:spcPts val="2200"/>
@@ -5539,10 +5577,12 @@
           </a:bodyPr>
           <a:lstStyle/>
           <a:p>
-            <a:pPr>
+            <a:pPr lvl="0" marL="457200" indent="-228600">
+              <a:buFont typeface="Calibri"/>
               <a:spcAft>
                 <a:spcPts val="1000"/>
               </a:spcAft>
+              <a:buSzPct val="100000"/>
               <a:buChar char="•"/>
               <a:lnSpc>
                 <a:spcPts val="2200"/>
@@ -5559,10 +5599,12 @@
             </a:r>
           </a:p>
           <a:p>
-            <a:pPr>
+            <a:pPr lvl="0" marL="457200" indent="-228600">
+              <a:buFont typeface="Calibri"/>
               <a:spcAft>
                 <a:spcPts val="1000"/>
               </a:spcAft>
+              <a:buSzPct val="100000"/>
               <a:buChar char="•"/>
               <a:lnSpc>
                 <a:spcPts val="2200"/>
@@ -5579,10 +5621,12 @@
             </a:r>
           </a:p>
           <a:p>
-            <a:pPr>
+            <a:pPr lvl="0" marL="457200" indent="-228600">
+              <a:buFont typeface="Calibri"/>
               <a:spcAft>
                 <a:spcPts val="1000"/>
               </a:spcAft>
+              <a:buSzPct val="100000"/>
               <a:buChar char="•"/>
               <a:lnSpc>
                 <a:spcPts val="2200"/>
@@ -5599,10 +5643,12 @@
             </a:r>
           </a:p>
           <a:p>
-            <a:pPr>
+            <a:pPr lvl="0" marL="457200" indent="-228600">
+              <a:buFont typeface="Calibri"/>
               <a:spcAft>
                 <a:spcPts val="1000"/>
               </a:spcAft>
+              <a:buSzPct val="100000"/>
               <a:buChar char="•"/>
               <a:lnSpc>
                 <a:spcPts val="2200"/>
@@ -5619,10 +5665,12 @@
             </a:r>
           </a:p>
           <a:p>
-            <a:pPr>
+            <a:pPr lvl="0" marL="457200" indent="-228600">
+              <a:buFont typeface="Calibri"/>
               <a:spcAft>
                 <a:spcPts val="1000"/>
               </a:spcAft>
+              <a:buSzPct val="100000"/>
               <a:buChar char="•"/>
               <a:lnSpc>
                 <a:spcPts val="2200"/>
@@ -5758,10 +5806,12 @@
           </a:bodyPr>
           <a:lstStyle/>
           <a:p>
-            <a:pPr>
+            <a:pPr lvl="0" marL="457200" indent="-228600">
+              <a:buFont typeface="Calibri"/>
               <a:spcAft>
                 <a:spcPts val="1000"/>
               </a:spcAft>
+              <a:buSzPct val="100000"/>
               <a:buChar char="•"/>
               <a:lnSpc>
                 <a:spcPts val="2200"/>
@@ -5778,10 +5828,12 @@
             </a:r>
           </a:p>
           <a:p>
-            <a:pPr>
+            <a:pPr lvl="0" marL="457200" indent="-228600">
+              <a:buFont typeface="Calibri"/>
               <a:spcAft>
                 <a:spcPts val="1000"/>
               </a:spcAft>
+              <a:buSzPct val="100000"/>
               <a:buChar char="•"/>
               <a:lnSpc>
                 <a:spcPts val="2200"/>
@@ -5798,10 +5850,12 @@
             </a:r>
           </a:p>
           <a:p>
-            <a:pPr>
+            <a:pPr lvl="0" marL="457200" indent="-228600">
+              <a:buFont typeface="Calibri"/>
               <a:spcAft>
                 <a:spcPts val="1000"/>
               </a:spcAft>
+              <a:buSzPct val="100000"/>
               <a:buChar char="•"/>
               <a:lnSpc>
                 <a:spcPts val="2200"/>
